--- a/3rd year/software engineering/3/3.pptx
+++ b/3rd year/software engineering/3/3.pptx
@@ -8,7 +8,7 @@
     <p:notesMasterId r:id="rId3"/>
   </p:notesMasterIdLst>
   <p:sldIdLst>
-    <p:sldId id="256" r:id="rId2"/>
+    <p:sldId id="257" r:id="rId2"/>
   </p:sldIdLst>
   <p:sldSz cx="12192000" cy="6858000"/>
   <p:notesSz cx="6858000" cy="9144000"/>
@@ -107,6 +107,11 @@
       </a:defRPr>
     </a:lvl9pPr>
   </p:defaultTextStyle>
+  <p:extLst>
+    <p:ext uri="{EFAFB233-063F-42B5-8137-9DF3F51BA10A}">
+      <p15:sldGuideLst xmlns:p15="http://schemas.microsoft.com/office/powerpoint/2012/main"/>
+    </p:ext>
+  </p:extLst>
 </p:presentation>
 </file>
 
@@ -192,7 +197,7 @@
           <a:p>
             <a:fld id="{FC610AE2-856A-4820-9984-82902F37EC28}" type="datetimeFigureOut">
               <a:rPr lang="ru-RU" smtClean="0"/>
-              <a:t>31.03.2025</a:t>
+              <a:t>01.06.2025</a:t>
             </a:fld>
             <a:endParaRPr lang="ru-RU"/>
           </a:p>
@@ -515,6 +520,18 @@
             <a:pPr>
               <a:buNone/>
             </a:pPr>
+            <a:r>
+              <a:rPr lang="ru-RU" dirty="0"/>
+              <a:t>На диаграмме представлены 2 актера: Пользователь и </a:t>
+            </a:r>
+            <a:r>
+              <a:rPr lang="en-US" dirty="0"/>
+              <a:t>Time</a:t>
+            </a:r>
+            <a:r>
+              <a:rPr lang="ru-RU" dirty="0"/>
+              <a:t>(время).</a:t>
+            </a:r>
             <a:endParaRPr lang="en-US" dirty="0"/>
           </a:p>
           <a:p>
@@ -587,34 +604,38 @@
             </a:r>
             <a:r>
               <a:rPr lang="ru-RU" dirty="0"/>
-              <a:t>Расширять отправку сообщений, прикрепляя файлы, фото и видео.</a:t>
-            </a:r>
+              <a:t>Расширять отправку сообщений, прикрепляя файлы, фото и </a:t>
+            </a:r>
+            <a:r>
+              <a:rPr lang="ru-RU"/>
+              <a:t>видео.</a:t>
+            </a:r>
+            <a:endParaRPr lang="ru-RU" dirty="0"/>
           </a:p>
           <a:p>
             <a:pPr>
-              <a:buFont typeface="Arial" panose="020B0604020202020204" pitchFamily="34" charset="0"/>
               <a:buNone/>
             </a:pPr>
-            <a:endParaRPr lang="ru-RU" dirty="0"/>
-          </a:p>
-          <a:p>
-            <a:pPr>
-              <a:buNone/>
-            </a:pPr>
             <a:r>
               <a:rPr lang="ru-RU" dirty="0"/>
-              <a:t>Также система автоматически отправляет уведомления о дне рождения друга.</a:t>
-            </a:r>
-          </a:p>
-          <a:p>
+              <a:t>Актер </a:t>
+            </a:r>
+            <a:r>
+              <a:rPr lang="en-US" dirty="0"/>
+              <a:t>Time </a:t>
+            </a:r>
             <a:r>
               <a:rPr lang="ru-RU" dirty="0"/>
-              <a:t>Таким образом, диаграмма помогает визуализировать основные возможности мессенджера и их </a:t>
-            </a:r>
-            <a:r>
-              <a:rPr lang="ru-RU"/>
-              <a:t>взаимосвязи.</a:t>
-            </a:r>
+              <a:t>автоматически отправляет уведомления о дне рождения друга.</a:t>
+            </a:r>
+          </a:p>
+          <a:p>
+            <a:r>
+              <a:rPr lang="ru-RU" dirty="0"/>
+              <a:t>Таким образом, диаграмма помогает визуализировать основные возможности мессенджера и их взаимосвязи.</a:t>
+            </a:r>
+          </a:p>
+          <a:p>
             <a:endParaRPr lang="ru-RU" dirty="0"/>
           </a:p>
         </p:txBody>
@@ -645,7 +666,7 @@
     </p:spTree>
     <p:extLst>
       <p:ext uri="{BB962C8B-B14F-4D97-AF65-F5344CB8AC3E}">
-        <p14:creationId xmlns:p14="http://schemas.microsoft.com/office/powerpoint/2010/main" val="4019783432"/>
+        <p14:creationId xmlns:p14="http://schemas.microsoft.com/office/powerpoint/2010/main" val="976250188"/>
       </p:ext>
     </p:extLst>
   </p:cSld>
@@ -802,7 +823,7 @@
           <a:p>
             <a:fld id="{CD0E9ACA-6314-4049-AE3C-E593F9187EEA}" type="datetimeFigureOut">
               <a:rPr lang="ru-RU" smtClean="0"/>
-              <a:t>31.03.2025</a:t>
+              <a:t>01.06.2025</a:t>
             </a:fld>
             <a:endParaRPr lang="ru-RU"/>
           </a:p>
@@ -1000,7 +1021,7 @@
           <a:p>
             <a:fld id="{CD0E9ACA-6314-4049-AE3C-E593F9187EEA}" type="datetimeFigureOut">
               <a:rPr lang="ru-RU" smtClean="0"/>
-              <a:t>31.03.2025</a:t>
+              <a:t>01.06.2025</a:t>
             </a:fld>
             <a:endParaRPr lang="ru-RU"/>
           </a:p>
@@ -1208,7 +1229,7 @@
           <a:p>
             <a:fld id="{CD0E9ACA-6314-4049-AE3C-E593F9187EEA}" type="datetimeFigureOut">
               <a:rPr lang="ru-RU" smtClean="0"/>
-              <a:t>31.03.2025</a:t>
+              <a:t>01.06.2025</a:t>
             </a:fld>
             <a:endParaRPr lang="ru-RU"/>
           </a:p>
@@ -1406,7 +1427,7 @@
           <a:p>
             <a:fld id="{CD0E9ACA-6314-4049-AE3C-E593F9187EEA}" type="datetimeFigureOut">
               <a:rPr lang="ru-RU" smtClean="0"/>
-              <a:t>31.03.2025</a:t>
+              <a:t>01.06.2025</a:t>
             </a:fld>
             <a:endParaRPr lang="ru-RU"/>
           </a:p>
@@ -1681,7 +1702,7 @@
           <a:p>
             <a:fld id="{CD0E9ACA-6314-4049-AE3C-E593F9187EEA}" type="datetimeFigureOut">
               <a:rPr lang="ru-RU" smtClean="0"/>
-              <a:t>31.03.2025</a:t>
+              <a:t>01.06.2025</a:t>
             </a:fld>
             <a:endParaRPr lang="ru-RU"/>
           </a:p>
@@ -1946,7 +1967,7 @@
           <a:p>
             <a:fld id="{CD0E9ACA-6314-4049-AE3C-E593F9187EEA}" type="datetimeFigureOut">
               <a:rPr lang="ru-RU" smtClean="0"/>
-              <a:t>31.03.2025</a:t>
+              <a:t>01.06.2025</a:t>
             </a:fld>
             <a:endParaRPr lang="ru-RU"/>
           </a:p>
@@ -2358,7 +2379,7 @@
           <a:p>
             <a:fld id="{CD0E9ACA-6314-4049-AE3C-E593F9187EEA}" type="datetimeFigureOut">
               <a:rPr lang="ru-RU" smtClean="0"/>
-              <a:t>31.03.2025</a:t>
+              <a:t>01.06.2025</a:t>
             </a:fld>
             <a:endParaRPr lang="ru-RU"/>
           </a:p>
@@ -2499,7 +2520,7 @@
           <a:p>
             <a:fld id="{CD0E9ACA-6314-4049-AE3C-E593F9187EEA}" type="datetimeFigureOut">
               <a:rPr lang="ru-RU" smtClean="0"/>
-              <a:t>31.03.2025</a:t>
+              <a:t>01.06.2025</a:t>
             </a:fld>
             <a:endParaRPr lang="ru-RU"/>
           </a:p>
@@ -2612,7 +2633,7 @@
           <a:p>
             <a:fld id="{CD0E9ACA-6314-4049-AE3C-E593F9187EEA}" type="datetimeFigureOut">
               <a:rPr lang="ru-RU" smtClean="0"/>
-              <a:t>31.03.2025</a:t>
+              <a:t>01.06.2025</a:t>
             </a:fld>
             <a:endParaRPr lang="ru-RU"/>
           </a:p>
@@ -2923,7 +2944,7 @@
           <a:p>
             <a:fld id="{CD0E9ACA-6314-4049-AE3C-E593F9187EEA}" type="datetimeFigureOut">
               <a:rPr lang="ru-RU" smtClean="0"/>
-              <a:t>31.03.2025</a:t>
+              <a:t>01.06.2025</a:t>
             </a:fld>
             <a:endParaRPr lang="ru-RU"/>
           </a:p>
@@ -3211,7 +3232,7 @@
           <a:p>
             <a:fld id="{CD0E9ACA-6314-4049-AE3C-E593F9187EEA}" type="datetimeFigureOut">
               <a:rPr lang="ru-RU" smtClean="0"/>
-              <a:t>31.03.2025</a:t>
+              <a:t>01.06.2025</a:t>
             </a:fld>
             <a:endParaRPr lang="ru-RU"/>
           </a:p>
@@ -3452,7 +3473,7 @@
           <a:p>
             <a:fld id="{CD0E9ACA-6314-4049-AE3C-E593F9187EEA}" type="datetimeFigureOut">
               <a:rPr lang="ru-RU" smtClean="0"/>
-              <a:t>31.03.2025</a:t>
+              <a:t>01.06.2025</a:t>
             </a:fld>
             <a:endParaRPr lang="ru-RU"/>
           </a:p>
@@ -3869,12 +3890,56 @@
           <a:chExt cx="0" cy="0"/>
         </a:xfrm>
       </p:grpSpPr>
+      <p:sp>
+        <p:nvSpPr>
+          <p:cNvPr id="2" name="Заголовок 1">
+            <a:extLst>
+              <a:ext uri="{FF2B5EF4-FFF2-40B4-BE49-F238E27FC236}">
+                <a16:creationId xmlns:a16="http://schemas.microsoft.com/office/drawing/2014/main" id="{4E129F1B-B111-BBE7-FAA5-A4EDA36FE35A}"/>
+              </a:ext>
+            </a:extLst>
+          </p:cNvPr>
+          <p:cNvSpPr>
+            <a:spLocks noGrp="1"/>
+          </p:cNvSpPr>
+          <p:nvPr>
+            <p:ph type="title"/>
+          </p:nvPr>
+        </p:nvSpPr>
+        <p:spPr>
+          <a:xfrm>
+            <a:off x="838200" y="89210"/>
+            <a:ext cx="10515600" cy="829139"/>
+          </a:xfrm>
+        </p:spPr>
+        <p:txBody>
+          <a:bodyPr>
+            <a:normAutofit/>
+          </a:bodyPr>
+          <a:lstStyle/>
+          <a:p>
+            <a:pPr algn="ctr"/>
+            <a:r>
+              <a:rPr lang="ru-RU" sz="4000" b="0" i="0" dirty="0">
+                <a:effectLst/>
+                <a:latin typeface="Times New Roman" panose="02020603050405020304" pitchFamily="18" charset="0"/>
+                <a:cs typeface="Times New Roman" panose="02020603050405020304" pitchFamily="18" charset="0"/>
+              </a:rPr>
+              <a:t>Диаграмма вариантов использования</a:t>
+            </a:r>
+            <a:endParaRPr lang="ru-RU" sz="4000" dirty="0">
+              <a:latin typeface="Times New Roman" panose="02020603050405020304" pitchFamily="18" charset="0"/>
+              <a:cs typeface="Times New Roman" panose="02020603050405020304" pitchFamily="18" charset="0"/>
+            </a:endParaRPr>
+          </a:p>
+        </p:txBody>
+      </p:sp>
       <p:pic>
         <p:nvPicPr>
-          <p:cNvPr id="5" name="Рисунок 4">
-            <a:extLst>
-              <a:ext uri="{FF2B5EF4-FFF2-40B4-BE49-F238E27FC236}">
-                <a16:creationId xmlns:a16="http://schemas.microsoft.com/office/drawing/2014/main" id="{758C05BD-B394-D676-4B5F-89EA843698C7}"/>
+          <p:cNvPr id="3" name="Рисунок 2">
+            <a:extLst>
+              <a:ext uri="{FF2B5EF4-FFF2-40B4-BE49-F238E27FC236}">
+                <a16:creationId xmlns:a16="http://schemas.microsoft.com/office/drawing/2014/main" id="{87CF3F5A-670C-4209-F626-2CDC00695D39}"/>
               </a:ext>
             </a:extLst>
           </p:cNvPr>
@@ -3891,8 +3956,8 @@
         </p:blipFill>
         <p:spPr>
           <a:xfrm>
-            <a:off x="630601" y="358267"/>
-            <a:ext cx="10930797" cy="6141465"/>
+            <a:off x="889589" y="918349"/>
+            <a:ext cx="10412822" cy="5850441"/>
           </a:xfrm>
           <a:prstGeom prst="rect">
             <a:avLst/>
@@ -3902,7 +3967,7 @@
     </p:spTree>
     <p:extLst>
       <p:ext uri="{BB962C8B-B14F-4D97-AF65-F5344CB8AC3E}">
-        <p14:creationId xmlns:p14="http://schemas.microsoft.com/office/powerpoint/2010/main" val="1006054978"/>
+        <p14:creationId xmlns:p14="http://schemas.microsoft.com/office/powerpoint/2010/main" val="362311568"/>
       </p:ext>
     </p:extLst>
   </p:cSld>
